--- a/MECH191_metallurgy/slideDecks/pptx/MECH191_Week12_Lecture.pptx
+++ b/MECH191_metallurgy/slideDecks/pptx/MECH191_Week12_Lecture.pptx
@@ -17971,7 +17971,7 @@
         </p:spPr>
         <p:txBody>
           <a:bodyPr wrap="none" lIns="0" rIns="0" tIns="0" bIns="0">
-            <a:spAutoFit/>
+            <a:noAutofit/>
           </a:bodyPr>
           <a:lstStyle/>
           <a:p>
@@ -17982,7 +17982,7 @@
                 </a:solidFill>
                 <a:latin typeface="Calibri"/>
               </a:rPr>
-              <a:t>Metallography Lab — Module 11</a:t>
+              <a:t>Alloy Research Portfolio — Module 11</a:t>
             </a:r>
           </a:p>
         </p:txBody>
@@ -18005,7 +18005,7 @@
         </p:spPr>
         <p:txBody>
           <a:bodyPr wrap="none" lIns="0" rIns="0" tIns="0" bIns="0">
-            <a:spAutoFit/>
+            <a:noAutofit/>
           </a:bodyPr>
           <a:lstStyle/>
           <a:p>
@@ -18016,7 +18016,7 @@
                 </a:solidFill>
                 <a:latin typeface="Calibri"/>
               </a:rPr>
-              <a:t>EXAMET-5-R-600-HD  ·  50–500×</a:t>
+              <a:t>No Microscope Required</a:t>
             </a:r>
           </a:p>
         </p:txBody>
@@ -18141,7 +18141,7 @@
         </p:spPr>
         <p:txBody>
           <a:bodyPr wrap="none" lIns="0" rIns="0" tIns="0" bIns="0">
-            <a:spAutoFit/>
+            <a:noAutofit/>
           </a:bodyPr>
           <a:lstStyle/>
           <a:p>
@@ -18152,7 +18152,7 @@
                 </a:solidFill>
                 <a:latin typeface="Calibri"/>
               </a:rPr>
-              <a:t>Examine near-surface grain condition at 500×. Identify any subsurface </a:t>
+              <a:t>Research machining effects on 1018, 1045, and 6061 — then pull your</a:t>
             </a:r>
           </a:p>
         </p:txBody>
@@ -18175,7 +18175,7 @@
         </p:spPr>
         <p:txBody>
           <a:bodyPr wrap="none" lIns="0" rIns="0" tIns="0" bIns="0">
-            <a:spAutoFit/>
+            <a:noAutofit/>
           </a:bodyPr>
           <a:lstStyle/>
           <a:p>
@@ -18186,7 +18186,7 @@
                 </a:solidFill>
                 <a:latin typeface="Calibri"/>
               </a:rPr>
-              <a:t>deformation from sectioning.</a:t>
+              <a:t>logged HV values to predict machinability and tool wear.</a:t>
             </a:r>
           </a:p>
         </p:txBody>
@@ -18243,7 +18243,7 @@
         </p:spPr>
         <p:txBody>
           <a:bodyPr wrap="none" lIns="0" rIns="0" tIns="0" bIns="0">
-            <a:spAutoFit/>
+            <a:noAutofit/>
           </a:bodyPr>
           <a:lstStyle/>
           <a:p>
@@ -18254,7 +18254,7 @@
                 </a:solidFill>
                 <a:latin typeface="Calibri"/>
               </a:rPr>
-              <a:t>1  Observe — complete feature table</a:t>
+              <a:t>1  Research — record data &amp; sources</a:t>
             </a:r>
           </a:p>
         </p:txBody>
@@ -18277,7 +18277,7 @@
         </p:spPr>
         <p:txBody>
           <a:bodyPr wrap="none" lIns="0" rIns="0" tIns="0" bIns="0">
-            <a:spAutoFit/>
+            <a:noAutofit/>
           </a:bodyPr>
           <a:lstStyle/>
           <a:p>
@@ -18288,7 +18288,7 @@
                 </a:solidFill>
                 <a:latin typeface="Calibri"/>
               </a:rPr>
-              <a:t>2  Sketch — label magnification &amp; specimen</a:t>
+              <a:t>2  Answer — short-answer questions</a:t>
             </a:r>
           </a:p>
         </p:txBody>
@@ -18311,7 +18311,7 @@
         </p:spPr>
         <p:txBody>
           <a:bodyPr wrap="none" lIns="0" rIns="0" tIns="0" bIns="0">
-            <a:spAutoFit/>
+            <a:noAutofit/>
           </a:bodyPr>
           <a:lstStyle/>
           <a:p>
@@ -18322,7 +18322,7 @@
                 </a:solidFill>
                 <a:latin typeface="Calibri"/>
               </a:rPr>
-              <a:t>3  Answer — 4 short questions</a:t>
+              <a:t>3  Apply — critical-thinking &amp; equations</a:t>
             </a:r>
           </a:p>
         </p:txBody>
@@ -18345,7 +18345,7 @@
         </p:spPr>
         <p:txBody>
           <a:bodyPr wrap="none" lIns="0" rIns="0" tIns="0" bIns="0">
-            <a:spAutoFit/>
+            <a:noAutofit/>
           </a:bodyPr>
           <a:lstStyle/>
           <a:p>
@@ -18356,7 +18356,7 @@
                 </a:solidFill>
                 <a:latin typeface="Calibri"/>
               </a:rPr>
-              <a:t>Specimens to Check Out</a:t>
+              <a:t>Alloys of Record</a:t>
             </a:r>
           </a:p>
         </p:txBody>
@@ -18379,7 +18379,7 @@
         </p:spPr>
         <p:txBody>
           <a:bodyPr wrap="none" lIns="0" rIns="0" tIns="0" bIns="0">
-            <a:spAutoFit/>
+            <a:noAutofit/>
           </a:bodyPr>
           <a:lstStyle/>
           <a:p>
@@ -18390,7 +18390,7 @@
                 </a:solidFill>
                 <a:latin typeface="Calibri"/>
               </a:rPr>
-              <a:t>· Specimen A — 1018 steel</a:t>
+              <a:t>· Alloy A — 1018 steel</a:t>
             </a:r>
           </a:p>
         </p:txBody>
@@ -18413,7 +18413,7 @@
         </p:spPr>
         <p:txBody>
           <a:bodyPr wrap="none" lIns="0" rIns="0" tIns="0" bIns="0">
-            <a:spAutoFit/>
+            <a:noAutofit/>
           </a:bodyPr>
           <a:lstStyle/>
           <a:p>
@@ -18424,7 +18424,7 @@
                 </a:solidFill>
                 <a:latin typeface="Calibri"/>
               </a:rPr>
-              <a:t>· Specimen B — 1045 steel</a:t>
+              <a:t>· Alloy B — 1045 steel</a:t>
             </a:r>
           </a:p>
         </p:txBody>
@@ -18447,7 +18447,7 @@
         </p:spPr>
         <p:txBody>
           <a:bodyPr wrap="none" lIns="0" rIns="0" tIns="0" bIns="0">
-            <a:spAutoFit/>
+            <a:noAutofit/>
           </a:bodyPr>
           <a:lstStyle/>
           <a:p>
@@ -18458,7 +18458,7 @@
                 </a:solidFill>
                 <a:latin typeface="Calibri"/>
               </a:rPr>
-              <a:t>· Specimen G — 6061-T6 aluminum</a:t>
+              <a:t>· Alloy G — 6061 aluminum</a:t>
             </a:r>
           </a:p>
         </p:txBody>
@@ -18481,7 +18481,7 @@
         </p:spPr>
         <p:txBody>
           <a:bodyPr wrap="none" lIns="0" rIns="0" tIns="0" bIns="0">
-            <a:spAutoFit/>
+            <a:noAutofit/>
           </a:bodyPr>
           <a:lstStyle/>
           <a:p>
@@ -18492,7 +18492,7 @@
                 </a:solidFill>
                 <a:latin typeface="Calibri"/>
               </a:rPr>
-              <a:t>How to check out the kit:</a:t>
+              <a:t>How to Complete This Module:</a:t>
             </a:r>
           </a:p>
         </p:txBody>
@@ -18515,7 +18515,7 @@
         </p:spPr>
         <p:txBody>
           <a:bodyPr wrap="none" lIns="0" rIns="0" tIns="0" bIns="0">
-            <a:spAutoFit/>
+            <a:noAutofit/>
           </a:bodyPr>
           <a:lstStyle/>
           <a:p>
@@ -18526,7 +18526,7 @@
                 </a:solidFill>
                 <a:latin typeface="Calibri"/>
               </a:rPr>
-              <a:t>1  See instructor after class today</a:t>
+              <a:t>1  Research the alloy(s) using credible sources</a:t>
             </a:r>
           </a:p>
         </p:txBody>
@@ -18549,7 +18549,7 @@
         </p:spPr>
         <p:txBody>
           <a:bodyPr wrap="none" lIns="0" rIns="0" tIns="0" bIns="0">
-            <a:spAutoFit/>
+            <a:noAutofit/>
           </a:bodyPr>
           <a:lstStyle/>
           <a:p>
@@ -18560,7 +18560,7 @@
                 </a:solidFill>
                 <a:latin typeface="Calibri"/>
               </a:rPr>
-              <a:t>2  Sign out the specimen tray</a:t>
+              <a:t>2  Record data with a source citation</a:t>
             </a:r>
           </a:p>
         </p:txBody>
@@ -18583,7 +18583,7 @@
         </p:spPr>
         <p:txBody>
           <a:bodyPr wrap="none" lIns="0" rIns="0" tIns="0" bIns="0">
-            <a:spAutoFit/>
+            <a:noAutofit/>
           </a:bodyPr>
           <a:lstStyle/>
           <a:p>
@@ -18594,7 +18594,7 @@
                 </a:solidFill>
                 <a:latin typeface="Calibri"/>
               </a:rPr>
-              <a:t>3  Use the EXAMET-5 at your convenience</a:t>
+              <a:t>3  Answer the short-answer questions</a:t>
             </a:r>
           </a:p>
         </p:txBody>
@@ -18617,7 +18617,7 @@
         </p:spPr>
         <p:txBody>
           <a:bodyPr wrap="none" lIns="0" rIns="0" tIns="0" bIns="0">
-            <a:spAutoFit/>
+            <a:noAutofit/>
           </a:bodyPr>
           <a:lstStyle/>
           <a:p>
@@ -18628,7 +18628,7 @@
                 </a:solidFill>
                 <a:latin typeface="Calibri"/>
               </a:rPr>
-              <a:t>4  Return kit before leaving class</a:t>
+              <a:t>4  Answer the critical-thinking questions</a:t>
             </a:r>
           </a:p>
         </p:txBody>
@@ -18651,7 +18651,7 @@
         </p:spPr>
         <p:txBody>
           <a:bodyPr wrap="none" lIns="0" rIns="0" tIns="0" bIns="0">
-            <a:spAutoFit/>
+            <a:noAutofit/>
           </a:bodyPr>
           <a:lstStyle/>
           <a:p>
@@ -18662,7 +18662,7 @@
                 </a:solidFill>
                 <a:latin typeface="Calibri"/>
               </a:rPr>
-              <a:t>5  Submit completed module with your portfolio</a:t>
+              <a:t>5  Keep the module with your portfolio</a:t>
             </a:r>
           </a:p>
         </p:txBody>
